--- a/docs/pptx/carbo/ritu-carbo-linsubhr-dosedisc-throm3.pptx
+++ b/docs/pptx/carbo/ritu-carbo-linsubhr-dosedisc-throm3.pptx
@@ -2350,7 +2350,7 @@
                   <a:latin typeface="Helvetica"/>
                   <a:cs typeface="Helvetica"/>
                 </a:rPr>
-                <a:t>(too few events among the 190 Local/Early patients)</a:t>
+                <a:t>(too few events among the 189 Local/Early patients)</a:t>
               </a:r>
             </a:p>
           </p:txBody>
@@ -2534,7 +2534,7 @@
                   <a:latin typeface="Helvetica"/>
                   <a:cs typeface="Helvetica"/>
                 </a:rPr>
-                <a:t>(too few events among the 190 Local/Early patients)</a:t>
+                <a:t>(too few events among the 189 Local/Early patients)</a:t>
               </a:r>
             </a:p>
           </p:txBody>
@@ -2639,8 +2639,8 @@
           </p:nvSpPr>
           <p:spPr>
             <a:xfrm>
-              <a:off x="3983126" y="4202427"/>
-              <a:ext cx="1177747" cy="88148"/>
+              <a:off x="3948973" y="4202427"/>
+              <a:ext cx="1246052" cy="88148"/>
             </a:xfrm>
             <a:prstGeom prst="rect">
               <a:avLst/>
@@ -2672,7 +2672,7 @@
                   <a:latin typeface="Helvetica"/>
                   <a:cs typeface="Helvetica"/>
                 </a:rPr>
-                <a:t>number = 4.9016e-18</a:t>
+                <a:t>number = 1.96563e-17</a:t>
               </a:r>
             </a:p>
           </p:txBody>
